--- a/week-02/presentations/ppts/day-01-metrics-kpis.pptx
+++ b/week-02/presentations/ppts/day-01-metrics-kpis.pptx
@@ -7678,35 +7678,7 @@
             </a:pPr>
             <a:r>
               <a:rPr/>
-              <a:t>North Star — “Are we winning?”</a:t>
-            </a:r>
-          </a:p>
-          <a:p>
-            <a:pPr lvl="0" indent="0" marL="0">
-              <a:buNone/>
-            </a:pPr>
-          </a:p>
-          <a:p>
-            <a:pPr lvl="0" indent="0" marL="0">
-              <a:buNone/>
-            </a:pPr>
-            <a:r>
-              <a:rPr/>
-              <a:t>KPIs — “Is the business healthy?”</a:t>
-            </a:r>
-          </a:p>
-          <a:p>
-            <a:pPr lvl="0" indent="0" marL="0">
-              <a:buNone/>
-            </a:pPr>
-          </a:p>
-          <a:p>
-            <a:pPr lvl="0" indent="0" marL="0">
-              <a:buNone/>
-            </a:pPr>
-            <a:r>
-              <a:rPr/>
-              <a:t>Operational signals — “What do we do today?”</a:t>
+              <a:t>North Star — “Are we winning?” KPIs — “Is the business healthy?” Operational signals — “What do we do today?”</a:t>
             </a:r>
           </a:p>
           <a:p>

--- a/week-02/presentations/ppts/day-01-metrics-kpis.pptx
+++ b/week-02/presentations/ppts/day-01-metrics-kpis.pptx
@@ -7975,7 +7975,7 @@
             </a:pPr>
             <a:r>
               <a:rPr/>
-              <a:t>A vanity metric is one that goes up when something happens that doesn’t actually matter, and can’t be moved by a deliberate decision.</a:t>
+              <a:t>A vanity metric is one that goes up and looks impressive, but whose rise can’t be attributed to a deliberate decision that created customer value — easy to move, hard to attribute.</a:t>
             </a:r>
           </a:p>
           <a:p>

--- a/week-02/presentations/ppts/day-01-metrics-kpis.pptx
+++ b/week-02/presentations/ppts/day-01-metrics-kpis.pptx
@@ -6067,7 +6067,7 @@
             </a:pPr>
             <a:r>
               <a:rPr/>
-              <a:t>Spoken in business terms (revenue, retention, time-to-value, NPS) — not feature terms</a:t>
+              <a:t>Spoken in business terms (revenue, retention, time-to-value, Net Promoter Score / NPS) — not feature terms</a:t>
             </a:r>
           </a:p>
           <a:p>
@@ -6238,7 +6238,7 @@
             </a:pPr>
             <a:r>
               <a:rPr/>
-              <a:t>Both ladder to NRR retention long-term</a:t>
+              <a:t>Both ladder to net revenue retention (NRR) long-term</a:t>
             </a:r>
           </a:p>
         </p:txBody>
@@ -7270,7 +7270,7 @@
             </a:pPr>
             <a:r>
               <a:rPr/>
-              <a:t>Distinguish operational signals, KPIs, and a North Star — three different audiences, three different rhythms</a:t>
+              <a:t>Distinguish operational signals, key performance indicators (KPIs), and a North Star — three different audiences, three different rhythms</a:t>
             </a:r>
           </a:p>
           <a:p>

--- a/week-02/presentations/ppts/day-01-metrics-kpis.pptx
+++ b/week-02/presentations/ppts/day-01-metrics-kpis.pptx
@@ -6842,6 +6842,18 @@
             <a:r>
               <a:rPr/>
               <a:t>You’re not going to nail your North Star today. Tomorrow is its full treatment. Today: write a placeholder.</a:t>
+            </a:r>
+          </a:p>
+          <a:p>
+            <a:pPr lvl="0" indent="0">
+              <a:buNone/>
+            </a:pPr>
+            <a:r>
+              <a:rPr>
+                <a:latin typeface="Courier"/>
+              </a:rPr>
+              <a:t>We are winning when [customer outcome] increases for
+[user segment], measured by [single number].</a:t>
             </a:r>
           </a:p>
           <a:p>

--- a/week-02/presentations/ppts/day-01-metrics-kpis.pptx
+++ b/week-02/presentations/ppts/day-01-metrics-kpis.pptx
@@ -1129,7 +1129,7 @@
             </a:pPr>
             <a:r>
               <a:rPr/>
-              <a:t>The three-sentence chain is the most useful single artifact you’ll teach this week. Have triads rehearse theirs out loud.</a:t>
+              <a:t>The three-sentence chain is the most useful single artifact you’ll teach this week. Have quads rehearse theirs out loud.</a:t>
             </a:r>
           </a:p>
         </p:txBody>
@@ -5866,16 +5866,16 @@
             </a:pPr>
             <a:r>
               <a:rPr b="1"/>
-              <a:t>Triads • 40 minutes</a:t>
-            </a:r>
-          </a:p>
-          <a:p>
-            <a:pPr lvl="0" indent="0" marL="0">
-              <a:buNone/>
-            </a:pPr>
-            <a:r>
-              <a:rPr/>
-              <a:t>For your triad’s Week-1 problem statement: brainstorm 12 candidate signals (4 per person), then cull to 6 finalists.</a:t>
+              <a:t>Quads • 40 minutes</a:t>
+            </a:r>
+          </a:p>
+          <a:p>
+            <a:pPr lvl="0" indent="0" marL="0">
+              <a:buNone/>
+            </a:pPr>
+            <a:r>
+              <a:rPr/>
+              <a:t>For your quad’s Week-1 problem statement: brainstorm 12 candidate signals (4 per person), then cull to 6 finalists.</a:t>
             </a:r>
           </a:p>
           <a:p>
@@ -5902,7 +5902,7 @@
             </a:pPr>
             <a:r>
               <a:rPr/>
-              <a:t>Add the 6 to your triad’s Metrics Tier Sheet (bottom row)</a:t>
+              <a:t>Add the 6 to your quad’s Metrics Tier Sheet (bottom row)</a:t>
             </a:r>
           </a:p>
           <a:p>
@@ -6394,7 +6394,7 @@
             </a:pPr>
             <a:r>
               <a:rPr b="1"/>
-              <a:t>Triads • 40 minutes</a:t>
+              <a:t>Quads • 40 minutes</a:t>
             </a:r>
           </a:p>
           <a:p>
@@ -6946,16 +6946,16 @@
             </a:pPr>
             <a:r>
               <a:rPr b="1"/>
-              <a:t>Triads • 45 minutes • Readouts</a:t>
-            </a:r>
-          </a:p>
-          <a:p>
-            <a:pPr lvl="0" indent="0" marL="0">
-              <a:buNone/>
-            </a:pPr>
-            <a:r>
-              <a:rPr/>
-              <a:t>Pair-defense round: each triad pairs with another. Defender presents the Tier Sheet (4 min). Challenger uses the Three Standard Challenges.</a:t>
+              <a:t>Quads • 45 minutes • Readouts</a:t>
+            </a:r>
+          </a:p>
+          <a:p>
+            <a:pPr lvl="0" indent="0" marL="0">
+              <a:buNone/>
+            </a:pPr>
+            <a:r>
+              <a:rPr/>
+              <a:t>Pair-defense round: each quad pairs with another. Defender presents the Tier Sheet (4 min). Challenger uses the Three Standard Challenges.</a:t>
             </a:r>
           </a:p>
           <a:p>
@@ -7099,7 +7099,7 @@
             </a:pPr>
             <a:r>
               <a:rPr/>
-              <a:t>Triad Metrics Tier Sheet</a:t>
+              <a:t>Quad Metrics Tier Sheet</a:t>
             </a:r>
           </a:p>
           <a:p>
@@ -7135,7 +7135,7 @@
             </a:pPr>
             <a:r>
               <a:rPr/>
-              <a:t>Bring to Day 2: Your Tier Sheet, your NS placeholder, and one alternative NS your triad debated and rejected.</a:t>
+              <a:t>Bring to Day 2: Your Tier Sheet, your NS placeholder, and one alternative NS your quad debated and rejected.</a:t>
             </a:r>
           </a:p>
         </p:txBody>
@@ -7318,7 +7318,7 @@
             </a:pPr>
             <a:r>
               <a:rPr/>
-              <a:t>Produce a triad Metrics Tier Sheet for your Week-1 problem statement</a:t>
+              <a:t>Produce a quad Metrics Tier Sheet for your Week-1 problem statement</a:t>
             </a:r>
           </a:p>
         </p:txBody>
@@ -8152,34 +8152,34 @@
             </a:pPr>
             <a:r>
               <a:rPr b="1"/>
-              <a:t>Triads • 35 minutes</a:t>
-            </a:r>
-          </a:p>
-          <a:p>
-            <a:pPr lvl="0" indent="0" marL="0">
-              <a:buNone/>
-            </a:pPr>
-            <a:r>
-              <a:rPr/>
-              <a:t>Each triad receives the Vanity-Metric Card Pack (12 cards from FieldPulse-adjacent SaaS). Place each on a 2x2 of Easy-to-game vs Lagging/Leading.</a:t>
-            </a:r>
-          </a:p>
-          <a:p>
-            <a:pPr lvl="0" indent="0" marL="0">
-              <a:buNone/>
-            </a:pPr>
-            <a:r>
-              <a:rPr/>
-              <a:t>Pick 2 cards your triad would bet on for FieldPulse</a:t>
-            </a:r>
-          </a:p>
-          <a:p>
-            <a:pPr lvl="0" indent="0" marL="0">
-              <a:buNone/>
-            </a:pPr>
-            <a:r>
-              <a:rPr/>
-              <a:t>Pick 2 cards your triad would never report up</a:t>
+              <a:t>Quads • 35 minutes</a:t>
+            </a:r>
+          </a:p>
+          <a:p>
+            <a:pPr lvl="0" indent="0" marL="0">
+              <a:buNone/>
+            </a:pPr>
+            <a:r>
+              <a:rPr/>
+              <a:t>Each quad receives the Vanity-Metric Card Pack (12 cards from FieldPulse-adjacent SaaS). Place each on a 2x2 of Easy-to-game vs Lagging/Leading.</a:t>
+            </a:r>
+          </a:p>
+          <a:p>
+            <a:pPr lvl="0" indent="0" marL="0">
+              <a:buNone/>
+            </a:pPr>
+            <a:r>
+              <a:rPr/>
+              <a:t>Pick 2 cards your quad would bet on for FieldPulse</a:t>
+            </a:r>
+          </a:p>
+          <a:p>
+            <a:pPr lvl="0" indent="0" marL="0">
+              <a:buNone/>
+            </a:pPr>
+            <a:r>
+              <a:rPr/>
+              <a:t>Pick 2 cards your quad would never report up</a:t>
             </a:r>
           </a:p>
           <a:p>

--- a/week-02/presentations/ppts/day-01-metrics-kpis.pptx
+++ b/week-02/presentations/ppts/day-01-metrics-kpis.pptx
@@ -5866,7 +5866,7 @@
             </a:pPr>
             <a:r>
               <a:rPr b="1"/>
-              <a:t>Quads • 40 minutes</a:t>
+              <a:t>Quads • 50 minutes</a:t>
             </a:r>
           </a:p>
           <a:p>
@@ -6394,7 +6394,7 @@
             </a:pPr>
             <a:r>
               <a:rPr b="1"/>
-              <a:t>Quads • 40 minutes</a:t>
+              <a:t>Quads • 50 minutes</a:t>
             </a:r>
           </a:p>
           <a:p>
@@ -6946,7 +6946,7 @@
             </a:pPr>
             <a:r>
               <a:rPr b="1"/>
-              <a:t>Quads • 45 minutes • Readouts</a:t>
+              <a:t>Quads • 55 minutes • Readouts</a:t>
             </a:r>
           </a:p>
           <a:p>
@@ -8152,7 +8152,7 @@
             </a:pPr>
             <a:r>
               <a:rPr b="1"/>
-              <a:t>Quads • 35 minutes</a:t>
+              <a:t>Quads • 45 minutes</a:t>
             </a:r>
           </a:p>
           <a:p>

--- a/week-02/presentations/ppts/day-01-metrics-kpis.pptx
+++ b/week-02/presentations/ppts/day-01-metrics-kpis.pptx
@@ -5911,7 +5911,7 @@
             </a:pPr>
             <a:r>
               <a:rPr/>
-              <a:t>⏱ 10 min solo · 15 min cull · 15 min annotate</a:t>
+              <a:t>⏱ 10 min solo · 25 min cull · 15 min annotate</a:t>
             </a:r>
           </a:p>
         </p:txBody>
@@ -6439,7 +6439,7 @@
             </a:pPr>
             <a:r>
               <a:rPr/>
-              <a:t>⏱ 15 min cluster · 15 min stress-test · 10 min chain narration</a:t>
+              <a:t>⏱ 25 min cluster · 15 min stress-test · 10 min chain narration</a:t>
             </a:r>
           </a:p>
         </p:txBody>
@@ -6973,7 +6973,7 @@
             </a:pPr>
             <a:r>
               <a:rPr/>
-              <a:t>20 min: pair-defense (4 min present, 4 min challenge per direction)</a:t>
+              <a:t>30 min: pair-defense (4 min present, 4 min challenge per direction)</a:t>
             </a:r>
           </a:p>
           <a:p>
@@ -8197,7 +8197,7 @@
             </a:pPr>
             <a:r>
               <a:rPr/>
-              <a:t>⏱ 10 min sort · 15 min discuss · 10 min readout prep</a:t>
+              <a:t>⏱ 10 min sort · 25 min discuss · 10 min readout prep</a:t>
             </a:r>
           </a:p>
         </p:txBody>
